--- a/проект3.pptx
+++ b/проект3.pptx
@@ -209,7 +209,7 @@
           <a:p>
             <a:fld id="{7EA1C4D5-F194-4005-B60F-B7FB925AC96C}" type="datetimeFigureOut">
               <a:rPr lang="ru-RU" smtClean="0"/>
-              <a:t>19.05.2026</a:t>
+              <a:t>21.05.2026</a:t>
             </a:fld>
             <a:endParaRPr lang="ru-RU"/>
           </a:p>
@@ -541,6 +541,90 @@
           <a:p>
             <a:fld id="{ACE6951F-430F-4AC5-BEC4-1CC767AF162F}" type="slidenum">
               <a:rPr lang="ru-RU" smtClean="0"/>
+              <a:t>4</a:t>
+            </a:fld>
+            <a:endParaRPr lang="ru-RU"/>
+          </a:p>
+        </p:txBody>
+      </p:sp>
+    </p:spTree>
+    <p:extLst>
+      <p:ext uri="{BB962C8B-B14F-4D97-AF65-F5344CB8AC3E}">
+        <p14:creationId xmlns:p14="http://schemas.microsoft.com/office/powerpoint/2010/main" val="3945322079"/>
+      </p:ext>
+    </p:extLst>
+  </p:cSld>
+  <p:clrMapOvr>
+    <a:masterClrMapping/>
+  </p:clrMapOvr>
+</p:notes>
+</file>
+
+<file path=ppt/notesSlides/notesSlide2.xml><?xml version="1.0" encoding="utf-8"?>
+<p:notes xmlns:a="http://schemas.openxmlformats.org/drawingml/2006/main" xmlns:r="http://schemas.openxmlformats.org/officeDocument/2006/relationships" xmlns:p="http://schemas.openxmlformats.org/presentationml/2006/main">
+  <p:cSld>
+    <p:spTree>
+      <p:nvGrpSpPr>
+        <p:cNvPr id="1" name=""/>
+        <p:cNvGrpSpPr/>
+        <p:nvPr/>
+      </p:nvGrpSpPr>
+      <p:grpSpPr>
+        <a:xfrm>
+          <a:off x="0" y="0"/>
+          <a:ext cx="0" cy="0"/>
+          <a:chOff x="0" y="0"/>
+          <a:chExt cx="0" cy="0"/>
+        </a:xfrm>
+      </p:grpSpPr>
+      <p:sp>
+        <p:nvSpPr>
+          <p:cNvPr id="2" name="Образ слайда 1"/>
+          <p:cNvSpPr>
+            <a:spLocks noGrp="1" noRot="1" noChangeAspect="1"/>
+          </p:cNvSpPr>
+          <p:nvPr>
+            <p:ph type="sldImg"/>
+          </p:nvPr>
+        </p:nvSpPr>
+        <p:spPr/>
+      </p:sp>
+      <p:sp>
+        <p:nvSpPr>
+          <p:cNvPr id="3" name="Заметки 2"/>
+          <p:cNvSpPr>
+            <a:spLocks noGrp="1"/>
+          </p:cNvSpPr>
+          <p:nvPr>
+            <p:ph type="body" idx="1"/>
+          </p:nvPr>
+        </p:nvSpPr>
+        <p:spPr/>
+        <p:txBody>
+          <a:bodyPr/>
+          <a:lstStyle/>
+          <a:p>
+            <a:endParaRPr lang="ru-RU" dirty="0"/>
+          </a:p>
+        </p:txBody>
+      </p:sp>
+      <p:sp>
+        <p:nvSpPr>
+          <p:cNvPr id="4" name="Номер слайда 3"/>
+          <p:cNvSpPr>
+            <a:spLocks noGrp="1"/>
+          </p:cNvSpPr>
+          <p:nvPr>
+            <p:ph type="sldNum" sz="quarter" idx="5"/>
+          </p:nvPr>
+        </p:nvSpPr>
+        <p:spPr/>
+        <p:txBody>
+          <a:bodyPr/>
+          <a:lstStyle/>
+          <a:p>
+            <a:fld id="{ACE6951F-430F-4AC5-BEC4-1CC767AF162F}" type="slidenum">
+              <a:rPr lang="ru-RU" smtClean="0"/>
               <a:t>7</a:t>
             </a:fld>
             <a:endParaRPr lang="ru-RU"/>
@@ -560,7 +644,7 @@
 </p:notes>
 </file>
 
-<file path=ppt/notesSlides/notesSlide2.xml><?xml version="1.0" encoding="utf-8"?>
+<file path=ppt/notesSlides/notesSlide3.xml><?xml version="1.0" encoding="utf-8"?>
 <p:notes xmlns:a="http://schemas.openxmlformats.org/drawingml/2006/main" xmlns:r="http://schemas.openxmlformats.org/officeDocument/2006/relationships" xmlns:p="http://schemas.openxmlformats.org/presentationml/2006/main">
   <p:cSld>
     <p:spTree>
@@ -659,6 +743,90 @@
     <p:extLst>
       <p:ext uri="{BB962C8B-B14F-4D97-AF65-F5344CB8AC3E}">
         <p14:creationId xmlns:p14="http://schemas.microsoft.com/office/powerpoint/2010/main" val="373339514"/>
+      </p:ext>
+    </p:extLst>
+  </p:cSld>
+  <p:clrMapOvr>
+    <a:masterClrMapping/>
+  </p:clrMapOvr>
+</p:notes>
+</file>
+
+<file path=ppt/notesSlides/notesSlide4.xml><?xml version="1.0" encoding="utf-8"?>
+<p:notes xmlns:a="http://schemas.openxmlformats.org/drawingml/2006/main" xmlns:r="http://schemas.openxmlformats.org/officeDocument/2006/relationships" xmlns:p="http://schemas.openxmlformats.org/presentationml/2006/main">
+  <p:cSld>
+    <p:spTree>
+      <p:nvGrpSpPr>
+        <p:cNvPr id="1" name=""/>
+        <p:cNvGrpSpPr/>
+        <p:nvPr/>
+      </p:nvGrpSpPr>
+      <p:grpSpPr>
+        <a:xfrm>
+          <a:off x="0" y="0"/>
+          <a:ext cx="0" cy="0"/>
+          <a:chOff x="0" y="0"/>
+          <a:chExt cx="0" cy="0"/>
+        </a:xfrm>
+      </p:grpSpPr>
+      <p:sp>
+        <p:nvSpPr>
+          <p:cNvPr id="2" name="Образ слайда 1"/>
+          <p:cNvSpPr>
+            <a:spLocks noGrp="1" noRot="1" noChangeAspect="1"/>
+          </p:cNvSpPr>
+          <p:nvPr>
+            <p:ph type="sldImg"/>
+          </p:nvPr>
+        </p:nvSpPr>
+        <p:spPr/>
+      </p:sp>
+      <p:sp>
+        <p:nvSpPr>
+          <p:cNvPr id="3" name="Заметки 2"/>
+          <p:cNvSpPr>
+            <a:spLocks noGrp="1"/>
+          </p:cNvSpPr>
+          <p:nvPr>
+            <p:ph type="body" idx="1"/>
+          </p:nvPr>
+        </p:nvSpPr>
+        <p:spPr/>
+        <p:txBody>
+          <a:bodyPr/>
+          <a:lstStyle/>
+          <a:p>
+            <a:endParaRPr lang="ru-RU" dirty="0"/>
+          </a:p>
+        </p:txBody>
+      </p:sp>
+      <p:sp>
+        <p:nvSpPr>
+          <p:cNvPr id="4" name="Номер слайда 3"/>
+          <p:cNvSpPr>
+            <a:spLocks noGrp="1"/>
+          </p:cNvSpPr>
+          <p:nvPr>
+            <p:ph type="sldNum" sz="quarter" idx="5"/>
+          </p:nvPr>
+        </p:nvSpPr>
+        <p:spPr/>
+        <p:txBody>
+          <a:bodyPr/>
+          <a:lstStyle/>
+          <a:p>
+            <a:fld id="{ACE6951F-430F-4AC5-BEC4-1CC767AF162F}" type="slidenum">
+              <a:rPr lang="ru-RU" smtClean="0"/>
+              <a:t>12</a:t>
+            </a:fld>
+            <a:endParaRPr lang="ru-RU"/>
+          </a:p>
+        </p:txBody>
+      </p:sp>
+    </p:spTree>
+    <p:extLst>
+      <p:ext uri="{BB962C8B-B14F-4D97-AF65-F5344CB8AC3E}">
+        <p14:creationId xmlns:p14="http://schemas.microsoft.com/office/powerpoint/2010/main" val="2631446242"/>
       </p:ext>
     </p:extLst>
   </p:cSld>
@@ -815,7 +983,7 @@
           <a:p>
             <a:fld id="{76A2016E-951E-4276-9CFA-C491F5BC6E95}" type="datetimeFigureOut">
               <a:rPr lang="ru-RU" smtClean="0"/>
-              <a:t>19.05.2026</a:t>
+              <a:t>21.05.2026</a:t>
             </a:fld>
             <a:endParaRPr lang="ru-RU"/>
           </a:p>
@@ -1013,7 +1181,7 @@
           <a:p>
             <a:fld id="{76A2016E-951E-4276-9CFA-C491F5BC6E95}" type="datetimeFigureOut">
               <a:rPr lang="ru-RU" smtClean="0"/>
-              <a:t>19.05.2026</a:t>
+              <a:t>21.05.2026</a:t>
             </a:fld>
             <a:endParaRPr lang="ru-RU"/>
           </a:p>
@@ -1221,7 +1389,7 @@
           <a:p>
             <a:fld id="{76A2016E-951E-4276-9CFA-C491F5BC6E95}" type="datetimeFigureOut">
               <a:rPr lang="ru-RU" smtClean="0"/>
-              <a:t>19.05.2026</a:t>
+              <a:t>21.05.2026</a:t>
             </a:fld>
             <a:endParaRPr lang="ru-RU"/>
           </a:p>
@@ -1419,7 +1587,7 @@
           <a:p>
             <a:fld id="{76A2016E-951E-4276-9CFA-C491F5BC6E95}" type="datetimeFigureOut">
               <a:rPr lang="ru-RU" smtClean="0"/>
-              <a:t>19.05.2026</a:t>
+              <a:t>21.05.2026</a:t>
             </a:fld>
             <a:endParaRPr lang="ru-RU"/>
           </a:p>
@@ -1694,7 +1862,7 @@
           <a:p>
             <a:fld id="{76A2016E-951E-4276-9CFA-C491F5BC6E95}" type="datetimeFigureOut">
               <a:rPr lang="ru-RU" smtClean="0"/>
-              <a:t>19.05.2026</a:t>
+              <a:t>21.05.2026</a:t>
             </a:fld>
             <a:endParaRPr lang="ru-RU"/>
           </a:p>
@@ -1959,7 +2127,7 @@
           <a:p>
             <a:fld id="{76A2016E-951E-4276-9CFA-C491F5BC6E95}" type="datetimeFigureOut">
               <a:rPr lang="ru-RU" smtClean="0"/>
-              <a:t>19.05.2026</a:t>
+              <a:t>21.05.2026</a:t>
             </a:fld>
             <a:endParaRPr lang="ru-RU"/>
           </a:p>
@@ -2371,7 +2539,7 @@
           <a:p>
             <a:fld id="{76A2016E-951E-4276-9CFA-C491F5BC6E95}" type="datetimeFigureOut">
               <a:rPr lang="ru-RU" smtClean="0"/>
-              <a:t>19.05.2026</a:t>
+              <a:t>21.05.2026</a:t>
             </a:fld>
             <a:endParaRPr lang="ru-RU"/>
           </a:p>
@@ -2512,7 +2680,7 @@
           <a:p>
             <a:fld id="{76A2016E-951E-4276-9CFA-C491F5BC6E95}" type="datetimeFigureOut">
               <a:rPr lang="ru-RU" smtClean="0"/>
-              <a:t>19.05.2026</a:t>
+              <a:t>21.05.2026</a:t>
             </a:fld>
             <a:endParaRPr lang="ru-RU"/>
           </a:p>
@@ -2625,7 +2793,7 @@
           <a:p>
             <a:fld id="{76A2016E-951E-4276-9CFA-C491F5BC6E95}" type="datetimeFigureOut">
               <a:rPr lang="ru-RU" smtClean="0"/>
-              <a:t>19.05.2026</a:t>
+              <a:t>21.05.2026</a:t>
             </a:fld>
             <a:endParaRPr lang="ru-RU"/>
           </a:p>
@@ -2936,7 +3104,7 @@
           <a:p>
             <a:fld id="{76A2016E-951E-4276-9CFA-C491F5BC6E95}" type="datetimeFigureOut">
               <a:rPr lang="ru-RU" smtClean="0"/>
-              <a:t>19.05.2026</a:t>
+              <a:t>21.05.2026</a:t>
             </a:fld>
             <a:endParaRPr lang="ru-RU"/>
           </a:p>
@@ -3224,7 +3392,7 @@
           <a:p>
             <a:fld id="{76A2016E-951E-4276-9CFA-C491F5BC6E95}" type="datetimeFigureOut">
               <a:rPr lang="ru-RU" smtClean="0"/>
-              <a:t>19.05.2026</a:t>
+              <a:t>21.05.2026</a:t>
             </a:fld>
             <a:endParaRPr lang="ru-RU"/>
           </a:p>
@@ -3465,7 +3633,7 @@
           <a:p>
             <a:fld id="{76A2016E-951E-4276-9CFA-C491F5BC6E95}" type="datetimeFigureOut">
               <a:rPr lang="ru-RU" smtClean="0"/>
-              <a:t>19.05.2026</a:t>
+              <a:t>21.05.2026</a:t>
             </a:fld>
             <a:endParaRPr lang="ru-RU"/>
           </a:p>
@@ -3950,18 +4118,10 @@
                   <a:schemeClr val="bg1"/>
                 </a:solidFill>
               </a:rPr>
-              <a:t>Проект </a:t>
-            </a:r>
-            <a:r>
-              <a:rPr lang="ru-RU" b="1" dirty="0" smtClean="0">
-                <a:solidFill>
-                  <a:schemeClr val="bg1"/>
-                </a:solidFill>
-              </a:rPr>
-              <a:t>№</a:t>
-            </a:r>
-            <a:r>
-              <a:rPr lang="en-US" b="1" dirty="0" smtClean="0">
+              <a:t>Проект №</a:t>
+            </a:r>
+            <a:r>
+              <a:rPr lang="en-US" b="1" dirty="0">
                 <a:solidFill>
                   <a:schemeClr val="bg1"/>
                 </a:solidFill>
@@ -3969,20 +4129,12 @@
               <a:t>3</a:t>
             </a:r>
             <a:r>
-              <a:rPr lang="ru-RU" b="1" dirty="0" smtClean="0">
+              <a:rPr lang="ru-RU" b="1" dirty="0">
                 <a:solidFill>
                   <a:schemeClr val="bg1"/>
                 </a:solidFill>
               </a:rPr>
               <a:t>. </a:t>
-            </a:r>
-            <a:r>
-              <a:rPr lang="ru-RU" b="1" dirty="0">
-                <a:solidFill>
-                  <a:schemeClr val="bg1"/>
-                </a:solidFill>
-              </a:rPr>
-              <a:t/>
             </a:r>
             <a:br>
               <a:rPr lang="ru-RU" b="1" dirty="0">
@@ -3992,18 +4144,13 @@
               </a:rPr>
             </a:br>
             <a:r>
-              <a:rPr lang="ru-RU" b="1" dirty="0" smtClean="0">
+              <a:rPr lang="ru-RU" b="1" dirty="0">
                 <a:solidFill>
                   <a:schemeClr val="bg1"/>
                 </a:solidFill>
               </a:rPr>
               <a:t>Тетрис</a:t>
             </a:r>
-            <a:endParaRPr lang="ru-RU" b="1" dirty="0">
-              <a:solidFill>
-                <a:schemeClr val="bg1"/>
-              </a:solidFill>
-            </a:endParaRPr>
           </a:p>
         </p:txBody>
       </p:sp>
@@ -4064,20 +4211,12 @@
           <a:p>
             <a:pPr algn="l"/>
             <a:r>
-              <a:rPr lang="ru-RU" dirty="0" smtClean="0">
-                <a:solidFill>
-                  <a:schemeClr val="bg1"/>
-                </a:solidFill>
-              </a:rPr>
-              <a:t>Шуба Константин (менеджер</a:t>
-            </a:r>
-            <a:r>
               <a:rPr lang="ru-RU" dirty="0">
                 <a:solidFill>
                   <a:schemeClr val="bg1"/>
                 </a:solidFill>
               </a:rPr>
-              <a:t>)</a:t>
+              <a:t>Шуба Константин (менеджер)</a:t>
             </a:r>
             <a:r>
               <a:rPr lang="en-US" dirty="0">
@@ -4091,7 +4230,7 @@
           <a:p>
             <a:pPr algn="l"/>
             <a:r>
-              <a:rPr lang="ru-RU" dirty="0" err="1" smtClean="0">
+              <a:rPr lang="ru-RU" dirty="0" err="1">
                 <a:solidFill>
                   <a:schemeClr val="bg1"/>
                 </a:solidFill>
@@ -4099,7 +4238,7 @@
               <a:t>Фарзалиев</a:t>
             </a:r>
             <a:r>
-              <a:rPr lang="ru-RU" dirty="0" smtClean="0">
+              <a:rPr lang="ru-RU" dirty="0">
                 <a:solidFill>
                   <a:schemeClr val="bg1"/>
                 </a:solidFill>
@@ -4107,7 +4246,7 @@
               <a:t> </a:t>
             </a:r>
             <a:r>
-              <a:rPr lang="ru-RU" dirty="0" err="1" smtClean="0">
+              <a:rPr lang="ru-RU" dirty="0" err="1">
                 <a:solidFill>
                   <a:schemeClr val="bg1"/>
                 </a:solidFill>
@@ -4115,20 +4254,12 @@
               <a:t>Теймур</a:t>
             </a:r>
             <a:r>
-              <a:rPr lang="ru-RU" dirty="0" smtClean="0">
-                <a:solidFill>
-                  <a:schemeClr val="bg1"/>
-                </a:solidFill>
-              </a:rPr>
-              <a:t> (разработчик</a:t>
-            </a:r>
-            <a:r>
               <a:rPr lang="ru-RU" dirty="0">
                 <a:solidFill>
                   <a:schemeClr val="bg1"/>
                 </a:solidFill>
               </a:rPr>
-              <a:t>)</a:t>
+              <a:t> (разработчик)</a:t>
             </a:r>
             <a:r>
               <a:rPr lang="en-US" dirty="0">
@@ -4147,7 +4278,7 @@
           <a:p>
             <a:pPr algn="l"/>
             <a:r>
-              <a:rPr lang="ru-RU" dirty="0" smtClean="0">
+              <a:rPr lang="ru-RU" dirty="0">
                 <a:solidFill>
                   <a:schemeClr val="bg1"/>
                 </a:solidFill>
@@ -4155,7 +4286,7 @@
               <a:t>Мартынюк Артём (</a:t>
             </a:r>
             <a:r>
-              <a:rPr lang="ru-RU" dirty="0" err="1" smtClean="0">
+              <a:rPr lang="ru-RU" dirty="0" err="1">
                 <a:solidFill>
                   <a:schemeClr val="bg1"/>
                 </a:solidFill>
@@ -4306,7 +4437,7 @@
           </a:lstStyle>
           <a:p>
             <a:r>
-              <a:rPr lang="ru-RU" sz="5400" b="1" dirty="0" smtClean="0">
+              <a:rPr lang="ru-RU" sz="5400" b="1" dirty="0">
                 <a:solidFill>
                   <a:schemeClr val="bg1"/>
                 </a:solidFill>
@@ -4513,15 +4644,7 @@
                   <a:schemeClr val="bg1"/>
                 </a:solidFill>
               </a:rPr>
-              <a:t>Функционал </a:t>
-            </a:r>
-            <a:r>
-              <a:rPr lang="ru-RU" sz="5400" b="1" dirty="0" smtClean="0">
-                <a:solidFill>
-                  <a:schemeClr val="bg1"/>
-                </a:solidFill>
-              </a:rPr>
-              <a:t>(Игровой процесс):</a:t>
+              <a:t>Функционал (Игровой процесс):</a:t>
             </a:r>
             <a:endParaRPr lang="ru-RU" sz="5400" dirty="0">
               <a:solidFill>
@@ -4578,7 +4701,7 @@
           <a:lstStyle/>
           <a:p>
             <a:r>
-              <a:rPr lang="ru-RU" dirty="0" smtClean="0">
+              <a:rPr lang="ru-RU" dirty="0">
                 <a:solidFill>
                   <a:schemeClr val="bg1"/>
                 </a:solidFill>
@@ -4586,7 +4709,7 @@
               <a:t>Каждые 500 очков уровень повышается и скорость падения фигур увеличивается. Если пространство заполнится блоками доверху, то игра остановится и появится уведомление. После этого или ещё во время игры можно нажать кнопки </a:t>
             </a:r>
             <a:r>
-              <a:rPr lang="en-US" dirty="0" smtClean="0">
+              <a:rPr lang="en-US" dirty="0">
                 <a:solidFill>
                   <a:schemeClr val="bg1"/>
                 </a:solidFill>
@@ -4594,7 +4717,7 @@
               <a:t>“</a:t>
             </a:r>
             <a:r>
-              <a:rPr lang="ru-RU" dirty="0" smtClean="0">
+              <a:rPr lang="ru-RU" dirty="0">
                 <a:solidFill>
                   <a:schemeClr val="bg1"/>
                 </a:solidFill>
@@ -4602,7 +4725,7 @@
               <a:t>Заново</a:t>
             </a:r>
             <a:r>
-              <a:rPr lang="en-US" dirty="0" smtClean="0">
+              <a:rPr lang="en-US" dirty="0">
                 <a:solidFill>
                   <a:schemeClr val="bg1"/>
                 </a:solidFill>
@@ -4610,7 +4733,7 @@
               <a:t>”</a:t>
             </a:r>
             <a:r>
-              <a:rPr lang="ru-RU" dirty="0" smtClean="0">
+              <a:rPr lang="ru-RU" dirty="0">
                 <a:solidFill>
                   <a:schemeClr val="bg1"/>
                 </a:solidFill>
@@ -4618,7 +4741,7 @@
               <a:t> и </a:t>
             </a:r>
             <a:r>
-              <a:rPr lang="en-US" dirty="0" smtClean="0">
+              <a:rPr lang="en-US" dirty="0">
                 <a:solidFill>
                   <a:schemeClr val="bg1"/>
                 </a:solidFill>
@@ -4626,7 +4749,7 @@
               <a:t>”</a:t>
             </a:r>
             <a:r>
-              <a:rPr lang="ru-RU" dirty="0" smtClean="0">
+              <a:rPr lang="ru-RU" dirty="0">
                 <a:solidFill>
                   <a:schemeClr val="bg1"/>
                 </a:solidFill>
@@ -4634,7 +4757,7 @@
               <a:t>Выйти</a:t>
             </a:r>
             <a:r>
-              <a:rPr lang="en-US" dirty="0" smtClean="0">
+              <a:rPr lang="en-US" dirty="0">
                 <a:solidFill>
                   <a:schemeClr val="bg1"/>
                 </a:solidFill>
@@ -4642,18 +4765,13 @@
               <a:t>”</a:t>
             </a:r>
             <a:r>
-              <a:rPr lang="ru-RU" dirty="0" smtClean="0">
+              <a:rPr lang="ru-RU" dirty="0">
                 <a:solidFill>
                   <a:schemeClr val="bg1"/>
                 </a:solidFill>
               </a:rPr>
               <a:t>.</a:t>
             </a:r>
-            <a:endParaRPr lang="ru-RU" dirty="0">
-              <a:solidFill>
-                <a:schemeClr val="bg1"/>
-              </a:solidFill>
-            </a:endParaRPr>
           </a:p>
         </p:txBody>
       </p:sp>
@@ -4710,7 +4828,7 @@
           </p:nvPr>
         </p:nvPicPr>
         <p:blipFill>
-          <a:blip r:embed="rId2">
+          <a:blip r:embed="rId3">
             <a:extLst>
               <a:ext uri="{28A0092B-C50C-407E-A947-70E740481C1C}">
                 <a14:useLocalDpi xmlns:a14="http://schemas.microsoft.com/office/drawing/2010/main" val="0"/>
@@ -4787,7 +4905,7 @@
         <p:spPr>
           <a:xfrm>
             <a:off x="816660" y="1225689"/>
-            <a:ext cx="10515600" cy="3477875"/>
+            <a:ext cx="10515600" cy="1938992"/>
           </a:xfrm>
           <a:prstGeom prst="rect">
             <a:avLst/>
@@ -4799,103 +4917,6 @@
             <a:spAutoFit/>
           </a:bodyPr>
           <a:lstStyle/>
-          <a:p>
-            <a:r>
-              <a:rPr lang="ru-RU" sz="2000" dirty="0">
-                <a:solidFill>
-                  <a:schemeClr val="bg1"/>
-                </a:solidFill>
-              </a:rPr>
-              <a:t>В ходе выполнения проекта был разработан программный продукт «Тетрис</a:t>
-            </a:r>
-            <a:r>
-              <a:rPr lang="ru-RU" sz="2000" dirty="0" smtClean="0">
-                <a:solidFill>
-                  <a:schemeClr val="bg1"/>
-                </a:solidFill>
-              </a:rPr>
-              <a:t>».</a:t>
-            </a:r>
-            <a:endParaRPr lang="ru-RU" sz="2000" dirty="0">
-              <a:solidFill>
-                <a:schemeClr val="bg1"/>
-              </a:solidFill>
-            </a:endParaRPr>
-          </a:p>
-          <a:p>
-            <a:r>
-              <a:rPr lang="ru-RU" sz="2000" dirty="0">
-                <a:solidFill>
-                  <a:schemeClr val="bg1"/>
-                </a:solidFill>
-              </a:rPr>
-              <a:t>В процессе работы были определены требования к программе, реализован алгоритм генерации и падения </a:t>
-            </a:r>
-            <a:r>
-              <a:rPr lang="ru-RU" sz="2000" dirty="0" smtClean="0">
-                <a:solidFill>
-                  <a:schemeClr val="bg1"/>
-                </a:solidFill>
-              </a:rPr>
-              <a:t>фигур, обработка </a:t>
-            </a:r>
-            <a:r>
-              <a:rPr lang="ru-RU" sz="2000" dirty="0">
-                <a:solidFill>
-                  <a:schemeClr val="bg1"/>
-                </a:solidFill>
-              </a:rPr>
-              <a:t>вращений, перемещений и коллизий, а также подсчёт очков и учёт линий. Создан графический </a:t>
-            </a:r>
-            <a:r>
-              <a:rPr lang="ru-RU" sz="2000" dirty="0" smtClean="0">
-                <a:solidFill>
-                  <a:schemeClr val="bg1"/>
-                </a:solidFill>
-              </a:rPr>
-              <a:t>интерфейс, </a:t>
-            </a:r>
-            <a:r>
-              <a:rPr lang="ru-RU" sz="2000" dirty="0">
-                <a:solidFill>
-                  <a:schemeClr val="bg1"/>
-                </a:solidFill>
-              </a:rPr>
-              <a:t>включающий игровое поле, отображение </a:t>
-            </a:r>
-            <a:r>
-              <a:rPr lang="ru-RU" sz="2000" dirty="0" smtClean="0">
-                <a:solidFill>
-                  <a:schemeClr val="bg1"/>
-                </a:solidFill>
-              </a:rPr>
-              <a:t>текущего уровня, </a:t>
-            </a:r>
-            <a:r>
-              <a:rPr lang="ru-RU" sz="2000" dirty="0">
-                <a:solidFill>
-                  <a:schemeClr val="bg1"/>
-                </a:solidFill>
-              </a:rPr>
-              <a:t>текущий </a:t>
-            </a:r>
-            <a:r>
-              <a:rPr lang="ru-RU" sz="2000" dirty="0" smtClean="0">
-                <a:solidFill>
-                  <a:schemeClr val="bg1"/>
-                </a:solidFill>
-              </a:rPr>
-              <a:t>счёта </a:t>
-            </a:r>
-            <a:r>
-              <a:rPr lang="ru-RU" sz="2000" dirty="0">
-                <a:solidFill>
-                  <a:schemeClr val="bg1"/>
-                </a:solidFill>
-              </a:rPr>
-              <a:t>и возможность перезапуска игры.</a:t>
-            </a:r>
-          </a:p>
           <a:p>
             <a:r>
               <a:rPr lang="ru-RU" sz="2000" dirty="0">
@@ -5245,14 +5266,6 @@
               </a:rPr>
               <a:t>Название</a:t>
             </a:r>
-            <a:r>
-              <a:rPr lang="ru-RU" sz="2400" dirty="0">
-                <a:solidFill>
-                  <a:schemeClr val="bg1"/>
-                </a:solidFill>
-              </a:rPr>
-              <a:t/>
-            </a:r>
             <a:br>
               <a:rPr lang="ru-RU" sz="2400" dirty="0">
                 <a:solidFill>
@@ -5260,14 +5273,6 @@
                 </a:solidFill>
               </a:rPr>
             </a:br>
-            <a:r>
-              <a:rPr lang="ru-RU" sz="2400" dirty="0">
-                <a:solidFill>
-                  <a:schemeClr val="bg1"/>
-                </a:solidFill>
-              </a:rPr>
-              <a:t/>
-            </a:r>
             <a:br>
               <a:rPr lang="ru-RU" sz="2400" dirty="0">
                 <a:solidFill>
@@ -5284,20 +5289,12 @@
               <a:t>Программа </a:t>
             </a:r>
             <a:r>
-              <a:rPr lang="ru-RU" sz="3200" smtClean="0">
+              <a:rPr lang="ru-RU" sz="3200">
                 <a:solidFill>
                   <a:schemeClr val="bg1"/>
                 </a:solidFill>
               </a:rPr>
               <a:t>«Тетрис»</a:t>
-            </a:r>
-            <a:r>
-              <a:rPr lang="ru-RU" sz="2400" dirty="0">
-                <a:solidFill>
-                  <a:schemeClr val="bg1"/>
-                </a:solidFill>
-              </a:rPr>
-              <a:t/>
             </a:r>
             <a:br>
               <a:rPr lang="ru-RU" sz="2400" dirty="0">
@@ -5329,14 +5326,6 @@
               </a:rPr>
               <a:t>Цель и актуальность проекта</a:t>
             </a:r>
-            <a:r>
-              <a:rPr lang="ru-RU" sz="2400" dirty="0">
-                <a:solidFill>
-                  <a:schemeClr val="bg1"/>
-                </a:solidFill>
-              </a:rPr>
-              <a:t/>
-            </a:r>
             <a:br>
               <a:rPr lang="ru-RU" sz="2400" dirty="0">
                 <a:solidFill>
@@ -5344,14 +5333,6 @@
                 </a:solidFill>
               </a:rPr>
             </a:br>
-            <a:r>
-              <a:rPr lang="ru-RU" sz="2400" dirty="0">
-                <a:solidFill>
-                  <a:schemeClr val="bg1"/>
-                </a:solidFill>
-              </a:rPr>
-              <a:t/>
-            </a:r>
             <a:br>
               <a:rPr lang="ru-RU" sz="2400" dirty="0">
                 <a:solidFill>
@@ -5390,14 +5371,6 @@
                 </a:solidFill>
               </a:rPr>
             </a:br>
-            <a:r>
-              <a:rPr lang="ru-RU" sz="2000" dirty="0">
-                <a:solidFill>
-                  <a:schemeClr val="bg1"/>
-                </a:solidFill>
-              </a:rPr>
-              <a:t/>
-            </a:r>
             <a:br>
               <a:rPr lang="ru-RU" sz="2000" dirty="0">
                 <a:solidFill>
@@ -5540,8 +5513,8 @@
         </p:nvSpPr>
         <p:spPr>
           <a:xfrm>
-            <a:off x="838200" y="1690688"/>
-            <a:ext cx="10515600" cy="5262979"/>
+            <a:off x="838200" y="2187838"/>
+            <a:ext cx="10515600" cy="2308324"/>
           </a:xfrm>
           <a:prstGeom prst="rect">
             <a:avLst/>
@@ -5575,7 +5548,47 @@
                   <a:schemeClr val="bg1"/>
                 </a:solidFill>
               </a:rPr>
-              <a:t>Разработать игровое поле размером 10×20 клеток. </a:t>
+              <a:t>Изучить проектную область</a:t>
+            </a:r>
+            <a:r>
+              <a:rPr lang="en-US" sz="2000" dirty="0">
+                <a:solidFill>
+                  <a:schemeClr val="bg1"/>
+                </a:solidFill>
+              </a:rPr>
+              <a:t> </a:t>
+            </a:r>
+            <a:r>
+              <a:rPr lang="ru-RU" sz="2000" dirty="0">
+                <a:solidFill>
+                  <a:schemeClr val="bg1"/>
+                </a:solidFill>
+              </a:rPr>
+              <a:t>и правила игры </a:t>
+            </a:r>
+            <a:r>
+              <a:rPr lang="en-US" sz="2000" dirty="0">
+                <a:solidFill>
+                  <a:schemeClr val="bg1"/>
+                </a:solidFill>
+              </a:rPr>
+              <a:t>‘</a:t>
+            </a:r>
+            <a:r>
+              <a:rPr lang="ru-RU" sz="2000" dirty="0">
+                <a:solidFill>
+                  <a:schemeClr val="bg1"/>
+                </a:solidFill>
+              </a:rPr>
+              <a:t>Тетрис</a:t>
+            </a:r>
+            <a:r>
+              <a:rPr lang="en-US" sz="2000" dirty="0">
+                <a:solidFill>
+                  <a:schemeClr val="bg1"/>
+                </a:solidFill>
+              </a:rPr>
+              <a:t>’;</a:t>
             </a:r>
           </a:p>
           <a:p>
@@ -5589,8 +5602,21 @@
                   <a:schemeClr val="bg1"/>
                 </a:solidFill>
               </a:rPr>
-              <a:t>Реализовать генерацию случайных фигур. </a:t>
-            </a:r>
+              <a:t>Спроектировать архитектуру приложения</a:t>
+            </a:r>
+            <a:r>
+              <a:rPr lang="en-US" sz="2000" dirty="0">
+                <a:solidFill>
+                  <a:schemeClr val="bg1"/>
+                </a:solidFill>
+              </a:rPr>
+              <a:t>;</a:t>
+            </a:r>
+            <a:endParaRPr lang="ru-RU" sz="2000" dirty="0">
+              <a:solidFill>
+                <a:schemeClr val="bg1"/>
+              </a:solidFill>
+            </a:endParaRPr>
           </a:p>
           <a:p>
             <a:pPr marL="342900" lvl="0" indent="-342900">
@@ -5603,8 +5629,21 @@
                   <a:schemeClr val="bg1"/>
                 </a:solidFill>
               </a:rPr>
-              <a:t>Создать механизм перемещения и вращения фигур. </a:t>
-            </a:r>
+              <a:t>Реализовать программу</a:t>
+            </a:r>
+            <a:r>
+              <a:rPr lang="en-US" sz="2000" dirty="0">
+                <a:solidFill>
+                  <a:schemeClr val="bg1"/>
+                </a:solidFill>
+              </a:rPr>
+              <a:t>;</a:t>
+            </a:r>
+            <a:endParaRPr lang="ru-RU" sz="2000" dirty="0">
+              <a:solidFill>
+                <a:schemeClr val="bg1"/>
+              </a:solidFill>
+            </a:endParaRPr>
           </a:p>
           <a:p>
             <a:pPr marL="342900" lvl="0" indent="-342900">
@@ -5617,127 +5656,16 @@
                   <a:schemeClr val="bg1"/>
                 </a:solidFill>
               </a:rPr>
-              <a:t>Реализовать проверку столкновений фигур с границами поля и другими блоками. </a:t>
-            </a:r>
-          </a:p>
-          <a:p>
-            <a:pPr marL="342900" lvl="0" indent="-342900">
-              <a:buFont typeface="Arial" panose="020B0604020202020204" pitchFamily="34" charset="0"/>
-              <a:buChar char="•"/>
-            </a:pPr>
-            <a:r>
-              <a:rPr lang="ru-RU" sz="2000" dirty="0">
-                <a:solidFill>
-                  <a:schemeClr val="bg1"/>
-                </a:solidFill>
-              </a:rPr>
-              <a:t>Добавить фиксацию фигур после приземления. </a:t>
-            </a:r>
-          </a:p>
-          <a:p>
-            <a:pPr marL="342900" lvl="0" indent="-342900">
-              <a:buFont typeface="Arial" panose="020B0604020202020204" pitchFamily="34" charset="0"/>
-              <a:buChar char="•"/>
-            </a:pPr>
-            <a:r>
-              <a:rPr lang="ru-RU" sz="2000" dirty="0">
-                <a:solidFill>
-                  <a:schemeClr val="bg1"/>
-                </a:solidFill>
-              </a:rPr>
-              <a:t>Реализовать удаление заполненных линий. </a:t>
-            </a:r>
-          </a:p>
-          <a:p>
-            <a:pPr marL="342900" lvl="0" indent="-342900">
-              <a:buFont typeface="Arial" panose="020B0604020202020204" pitchFamily="34" charset="0"/>
-              <a:buChar char="•"/>
-            </a:pPr>
-            <a:r>
-              <a:rPr lang="ru-RU" sz="2000" dirty="0">
-                <a:solidFill>
-                  <a:schemeClr val="bg1"/>
-                </a:solidFill>
-              </a:rPr>
-              <a:t>Добавить систему подсчёта очков и уровней. </a:t>
-            </a:r>
-          </a:p>
-          <a:p>
-            <a:pPr marL="342900" lvl="0" indent="-342900">
-              <a:buFont typeface="Arial" panose="020B0604020202020204" pitchFamily="34" charset="0"/>
-              <a:buChar char="•"/>
-            </a:pPr>
-            <a:r>
-              <a:rPr lang="ru-RU" sz="2000" dirty="0">
-                <a:solidFill>
-                  <a:schemeClr val="bg1"/>
-                </a:solidFill>
-              </a:rPr>
-              <a:t>Реализовать увеличение скорости игры с ростом уровня. </a:t>
-            </a:r>
-          </a:p>
-          <a:p>
-            <a:pPr marL="342900" lvl="0" indent="-342900">
-              <a:buFont typeface="Arial" panose="020B0604020202020204" pitchFamily="34" charset="0"/>
-              <a:buChar char="•"/>
-            </a:pPr>
-            <a:r>
-              <a:rPr lang="ru-RU" sz="2000" dirty="0">
-                <a:solidFill>
-                  <a:schemeClr val="bg1"/>
-                </a:solidFill>
-              </a:rPr>
-              <a:t>Создать графический интерфейс пользователя. </a:t>
-            </a:r>
-          </a:p>
-          <a:p>
-            <a:pPr marL="342900" lvl="0" indent="-342900">
-              <a:buFont typeface="Arial" panose="020B0604020202020204" pitchFamily="34" charset="0"/>
-              <a:buChar char="•"/>
-            </a:pPr>
-            <a:r>
-              <a:rPr lang="ru-RU" sz="2000" dirty="0">
-                <a:solidFill>
-                  <a:schemeClr val="bg1"/>
-                </a:solidFill>
-              </a:rPr>
-              <a:t>Реализовать главное меню и кнопки управления игрой. </a:t>
-            </a:r>
-          </a:p>
-          <a:p>
-            <a:pPr marL="342900" lvl="0" indent="-342900">
-              <a:buFont typeface="Arial" panose="020B0604020202020204" pitchFamily="34" charset="0"/>
-              <a:buChar char="•"/>
-            </a:pPr>
-            <a:r>
-              <a:rPr lang="ru-RU" sz="2000" dirty="0">
-                <a:solidFill>
-                  <a:schemeClr val="bg1"/>
-                </a:solidFill>
-              </a:rPr>
-              <a:t>Добавить экран завершения игры. </a:t>
-            </a:r>
-          </a:p>
-          <a:p>
-            <a:pPr marL="342900" lvl="0" indent="-342900">
-              <a:buFont typeface="Arial" panose="020B0604020202020204" pitchFamily="34" charset="0"/>
-              <a:buChar char="•"/>
-            </a:pPr>
-            <a:r>
-              <a:rPr lang="ru-RU" sz="2000" dirty="0">
-                <a:solidFill>
-                  <a:schemeClr val="bg1"/>
-                </a:solidFill>
-              </a:rPr>
-              <a:t>Обеспечить корректную работу программы без сбоев.</a:t>
-            </a:r>
-          </a:p>
-          <a:p>
-            <a:endParaRPr lang="ru-RU" sz="3200" dirty="0">
-              <a:solidFill>
-                <a:schemeClr val="bg1"/>
-              </a:solidFill>
-            </a:endParaRPr>
+              <a:t>Провести тестирование</a:t>
+            </a:r>
+            <a:r>
+              <a:rPr lang="en-US" sz="2000" dirty="0">
+                <a:solidFill>
+                  <a:schemeClr val="bg1"/>
+                </a:solidFill>
+              </a:rPr>
+              <a:t>.</a:t>
+            </a:r>
           </a:p>
         </p:txBody>
       </p:sp>
@@ -5794,7 +5722,7 @@
           </p:nvPr>
         </p:nvPicPr>
         <p:blipFill>
-          <a:blip r:embed="rId2">
+          <a:blip r:embed="rId3">
             <a:extLst>
               <a:ext uri="{28A0092B-C50C-407E-A947-70E740481C1C}">
                 <a14:useLocalDpi xmlns:a14="http://schemas.microsoft.com/office/drawing/2010/main" val="0"/>
@@ -5846,15 +5774,7 @@
                   <a:schemeClr val="bg1"/>
                 </a:solidFill>
               </a:rPr>
-              <a:t>Функциональные </a:t>
-            </a:r>
-            <a:r>
-              <a:rPr lang="ru-RU" sz="5400" b="1" dirty="0" smtClean="0">
-                <a:solidFill>
-                  <a:schemeClr val="bg1"/>
-                </a:solidFill>
-              </a:rPr>
-              <a:t>требования</a:t>
+              <a:t>Функциональные требования</a:t>
             </a:r>
             <a:endParaRPr lang="ru-RU" sz="5400" dirty="0">
               <a:solidFill>
@@ -5879,7 +5799,7 @@
         <p:spPr>
           <a:xfrm>
             <a:off x="816660" y="1436688"/>
-            <a:ext cx="10515600" cy="5016758"/>
+            <a:ext cx="10515600" cy="4401205"/>
           </a:xfrm>
           <a:prstGeom prst="rect">
             <a:avLst/>
@@ -5902,7 +5822,7 @@
                   <a:schemeClr val="bg1"/>
                 </a:solidFill>
               </a:rPr>
-              <a:t>запуск игры через главное меню;</a:t>
+              <a:t>Визуализация:</a:t>
             </a:r>
           </a:p>
           <a:p>
@@ -5916,7 +5836,7 @@
                   <a:schemeClr val="bg1"/>
                 </a:solidFill>
               </a:rPr>
-              <a:t>отображение игрового поля;</a:t>
+              <a:t>	отображение игрового поля, текущего количества очков, уровня сложности;</a:t>
             </a:r>
           </a:p>
           <a:p>
@@ -5930,7 +5850,77 @@
                   <a:schemeClr val="bg1"/>
                 </a:solidFill>
               </a:rPr>
-              <a:t>отображение текущего количества очков;</a:t>
+              <a:t>Правила игры:</a:t>
+            </a:r>
+          </a:p>
+          <a:p>
+            <a:pPr marL="800100" lvl="1" indent="-342900">
+              <a:buFont typeface="Arial" panose="020B0604020202020204" pitchFamily="34" charset="0"/>
+              <a:buChar char="•"/>
+            </a:pPr>
+            <a:r>
+              <a:rPr lang="ru-RU" sz="2000" dirty="0">
+                <a:solidFill>
+                  <a:schemeClr val="bg1"/>
+                </a:solidFill>
+              </a:rPr>
+              <a:t>генерация случайных фигур, возможность их перемещения (влево, вправо) и вращения, а также фиксация при столкновении;</a:t>
+            </a:r>
+          </a:p>
+          <a:p>
+            <a:pPr marL="800100" lvl="1" indent="-342900">
+              <a:buFont typeface="Arial" panose="020B0604020202020204" pitchFamily="34" charset="0"/>
+              <a:buChar char="•"/>
+            </a:pPr>
+            <a:r>
+              <a:rPr lang="ru-RU" sz="2000" dirty="0">
+                <a:solidFill>
+                  <a:schemeClr val="bg1"/>
+                </a:solidFill>
+              </a:rPr>
+              <a:t>автоматическое движение фигур вниз;</a:t>
+            </a:r>
+          </a:p>
+          <a:p>
+            <a:pPr marL="800100" lvl="1" indent="-342900">
+              <a:buFont typeface="Arial" panose="020B0604020202020204" pitchFamily="34" charset="0"/>
+              <a:buChar char="•"/>
+            </a:pPr>
+            <a:r>
+              <a:rPr lang="ru-RU" sz="2000" dirty="0">
+                <a:solidFill>
+                  <a:schemeClr val="bg1"/>
+                </a:solidFill>
+              </a:rPr>
+              <a:t>ускоренное опускание фигур вниз;</a:t>
+            </a:r>
+          </a:p>
+          <a:p>
+            <a:pPr marL="800100" lvl="1" indent="-342900">
+              <a:buFont typeface="Arial" panose="020B0604020202020204" pitchFamily="34" charset="0"/>
+              <a:buChar char="•"/>
+            </a:pPr>
+            <a:r>
+              <a:rPr lang="ru-RU" sz="2000" dirty="0">
+                <a:solidFill>
+                  <a:schemeClr val="bg1"/>
+                </a:solidFill>
+              </a:rPr>
+              <a:t>удаление полностью заполненных линий;</a:t>
+            </a:r>
+          </a:p>
+          <a:p>
+            <a:pPr marL="800100" lvl="1" indent="-342900">
+              <a:buFont typeface="Arial" panose="020B0604020202020204" pitchFamily="34" charset="0"/>
+              <a:buChar char="•"/>
+            </a:pPr>
+            <a:r>
+              <a:rPr lang="ru-RU" sz="2000" dirty="0">
+                <a:solidFill>
+                  <a:schemeClr val="bg1"/>
+                </a:solidFill>
+              </a:rPr>
+              <a:t>увеличение уровня сложности и скорости игры после очистки нескольких линий;</a:t>
             </a:r>
           </a:p>
           <a:p>
@@ -5944,11 +5934,11 @@
                   <a:schemeClr val="bg1"/>
                 </a:solidFill>
               </a:rPr>
-              <a:t>отображение уровня сложности;</a:t>
-            </a:r>
-          </a:p>
-          <a:p>
-            <a:pPr marL="342900" lvl="0" indent="-342900">
+              <a:t>Возможности:</a:t>
+            </a:r>
+          </a:p>
+          <a:p>
+            <a:pPr marL="800100" lvl="1" indent="-342900">
               <a:buFont typeface="Arial" panose="020B0604020202020204" pitchFamily="34" charset="0"/>
               <a:buChar char="•"/>
             </a:pPr>
@@ -5958,11 +5948,11 @@
                   <a:schemeClr val="bg1"/>
                 </a:solidFill>
               </a:rPr>
-              <a:t>генерация случайных фигур;</a:t>
-            </a:r>
-          </a:p>
-          <a:p>
-            <a:pPr marL="342900" lvl="0" indent="-342900">
+              <a:t>запуск игры через главное меню;</a:t>
+            </a:r>
+          </a:p>
+          <a:p>
+            <a:pPr marL="800100" lvl="1" indent="-342900">
               <a:buFont typeface="Arial" panose="020B0604020202020204" pitchFamily="34" charset="0"/>
               <a:buChar char="•"/>
             </a:pPr>
@@ -5972,11 +5962,11 @@
                   <a:schemeClr val="bg1"/>
                 </a:solidFill>
               </a:rPr>
-              <a:t>перемещение фигур влево и вправо;</a:t>
-            </a:r>
-          </a:p>
-          <a:p>
-            <a:pPr marL="342900" lvl="0" indent="-342900">
+              <a:t>перезапуск игры;</a:t>
+            </a:r>
+          </a:p>
+          <a:p>
+            <a:pPr marL="800100" lvl="1" indent="-342900">
               <a:buFont typeface="Arial" panose="020B0604020202020204" pitchFamily="34" charset="0"/>
               <a:buChar char="•"/>
             </a:pPr>
@@ -5986,11 +5976,11 @@
                   <a:schemeClr val="bg1"/>
                 </a:solidFill>
               </a:rPr>
-              <a:t>ускоренное опускание фигур вниз;</a:t>
-            </a:r>
-          </a:p>
-          <a:p>
-            <a:pPr marL="342900" lvl="0" indent="-342900">
+              <a:t>завершение игры при заполнении верхней части поля;</a:t>
+            </a:r>
+          </a:p>
+          <a:p>
+            <a:pPr marL="800100" lvl="1" indent="-342900">
               <a:buFont typeface="Arial" panose="020B0604020202020204" pitchFamily="34" charset="0"/>
               <a:buChar char="•"/>
             </a:pPr>
@@ -6000,181 +5990,56 @@
                   <a:schemeClr val="bg1"/>
                 </a:solidFill>
               </a:rPr>
-              <a:t>вращение фигур;</a:t>
-            </a:r>
-          </a:p>
-          <a:p>
-            <a:pPr marL="342900" lvl="0" indent="-342900">
-              <a:buFont typeface="Arial" panose="020B0604020202020204" pitchFamily="34" charset="0"/>
-              <a:buChar char="•"/>
-            </a:pPr>
+              <a:t>кнопка для </a:t>
+            </a:r>
+            <a:r>
+              <a:rPr lang="en-US" sz="2000" dirty="0" err="1">
+                <a:solidFill>
+                  <a:schemeClr val="bg1"/>
+                </a:solidFill>
+              </a:rPr>
+              <a:t>выхода</a:t>
+            </a:r>
+            <a:r>
+              <a:rPr lang="en-US" sz="2000" dirty="0">
+                <a:solidFill>
+                  <a:schemeClr val="bg1"/>
+                </a:solidFill>
+              </a:rPr>
+              <a:t> </a:t>
+            </a:r>
+            <a:r>
+              <a:rPr lang="en-US" sz="2000" dirty="0" err="1">
+                <a:solidFill>
+                  <a:schemeClr val="bg1"/>
+                </a:solidFill>
+              </a:rPr>
+              <a:t>из</a:t>
+            </a:r>
+            <a:r>
+              <a:rPr lang="en-US" sz="2000" dirty="0">
+                <a:solidFill>
+                  <a:schemeClr val="bg1"/>
+                </a:solidFill>
+              </a:rPr>
+              <a:t> </a:t>
+            </a:r>
+            <a:r>
+              <a:rPr lang="en-US" sz="2000" dirty="0" err="1">
+                <a:solidFill>
+                  <a:schemeClr val="bg1"/>
+                </a:solidFill>
+              </a:rPr>
+              <a:t>программы</a:t>
+            </a:r>
             <a:r>
               <a:rPr lang="ru-RU" sz="2000" dirty="0">
                 <a:solidFill>
                   <a:schemeClr val="bg1"/>
                 </a:solidFill>
               </a:rPr>
-              <a:t>автоматическое движение фигур вниз;</a:t>
-            </a:r>
-          </a:p>
-          <a:p>
-            <a:pPr marL="342900" lvl="0" indent="-342900">
-              <a:buFont typeface="Arial" panose="020B0604020202020204" pitchFamily="34" charset="0"/>
-              <a:buChar char="•"/>
-            </a:pPr>
-            <a:r>
-              <a:rPr lang="ru-RU" sz="2000" dirty="0">
-                <a:solidFill>
-                  <a:schemeClr val="bg1"/>
-                </a:solidFill>
-              </a:rPr>
-              <a:t>фиксация фигуры при столкновении;</a:t>
-            </a:r>
-          </a:p>
-          <a:p>
-            <a:pPr marL="342900" lvl="0" indent="-342900">
-              <a:buFont typeface="Arial" panose="020B0604020202020204" pitchFamily="34" charset="0"/>
-              <a:buChar char="•"/>
-            </a:pPr>
-            <a:r>
-              <a:rPr lang="ru-RU" sz="2000" dirty="0">
-                <a:solidFill>
-                  <a:schemeClr val="bg1"/>
-                </a:solidFill>
-              </a:rPr>
-              <a:t>удаление полностью заполненных линий;</a:t>
-            </a:r>
-          </a:p>
-          <a:p>
-            <a:pPr marL="342900" lvl="0" indent="-342900">
-              <a:buFont typeface="Arial" panose="020B0604020202020204" pitchFamily="34" charset="0"/>
-              <a:buChar char="•"/>
-            </a:pPr>
-            <a:r>
-              <a:rPr lang="ru-RU" sz="2000" dirty="0">
-                <a:solidFill>
-                  <a:schemeClr val="bg1"/>
-                </a:solidFill>
-              </a:rPr>
-              <a:t>увеличение уровня сложности после очистки нескольких линий;</a:t>
-            </a:r>
-          </a:p>
-          <a:p>
-            <a:pPr marL="342900" lvl="0" indent="-342900">
-              <a:buFont typeface="Arial" panose="020B0604020202020204" pitchFamily="34" charset="0"/>
-              <a:buChar char="•"/>
-            </a:pPr>
-            <a:r>
-              <a:rPr lang="ru-RU" sz="2000" dirty="0">
-                <a:solidFill>
-                  <a:schemeClr val="bg1"/>
-                </a:solidFill>
-              </a:rPr>
-              <a:t>увеличение скорости игры;</a:t>
-            </a:r>
-          </a:p>
-          <a:p>
-            <a:pPr marL="342900" lvl="0" indent="-342900">
-              <a:buFont typeface="Arial" panose="020B0604020202020204" pitchFamily="34" charset="0"/>
-              <a:buChar char="•"/>
-            </a:pPr>
-            <a:r>
-              <a:rPr lang="ru-RU" sz="2000" dirty="0">
-                <a:solidFill>
-                  <a:schemeClr val="bg1"/>
-                </a:solidFill>
-              </a:rPr>
-              <a:t>возможность перезапуска игры;</a:t>
-            </a:r>
-          </a:p>
-          <a:p>
-            <a:pPr marL="342900" lvl="0" indent="-342900">
-              <a:buFont typeface="Arial" panose="020B0604020202020204" pitchFamily="34" charset="0"/>
-              <a:buChar char="•"/>
-            </a:pPr>
-            <a:r>
-              <a:rPr lang="ru-RU" sz="2000" dirty="0">
-                <a:solidFill>
-                  <a:schemeClr val="bg1"/>
-                </a:solidFill>
-              </a:rPr>
-              <a:t>завершение игры при заполнении верхней части поля;</a:t>
-            </a:r>
-          </a:p>
-          <a:p>
-            <a:pPr marL="342900" lvl="0" indent="-342900">
-              <a:buFont typeface="Arial" panose="020B0604020202020204" pitchFamily="34" charset="0"/>
-              <a:buChar char="•"/>
-            </a:pPr>
-            <a:r>
-              <a:rPr lang="en-US" sz="2000" dirty="0" err="1">
-                <a:solidFill>
-                  <a:schemeClr val="bg1"/>
-                </a:solidFill>
-              </a:rPr>
-              <a:t>возможность</a:t>
-            </a:r>
-            <a:r>
-              <a:rPr lang="en-US" sz="2000" dirty="0">
-                <a:solidFill>
-                  <a:schemeClr val="bg1"/>
-                </a:solidFill>
-              </a:rPr>
-              <a:t> </a:t>
-            </a:r>
-            <a:r>
-              <a:rPr lang="en-US" sz="2000" dirty="0" err="1">
-                <a:solidFill>
-                  <a:schemeClr val="bg1"/>
-                </a:solidFill>
-              </a:rPr>
-              <a:t>выхода</a:t>
-            </a:r>
-            <a:r>
-              <a:rPr lang="en-US" sz="2000" dirty="0">
-                <a:solidFill>
-                  <a:schemeClr val="bg1"/>
-                </a:solidFill>
-              </a:rPr>
-              <a:t> </a:t>
-            </a:r>
-            <a:r>
-              <a:rPr lang="en-US" sz="2000" dirty="0" err="1">
-                <a:solidFill>
-                  <a:schemeClr val="bg1"/>
-                </a:solidFill>
-              </a:rPr>
-              <a:t>из</a:t>
-            </a:r>
-            <a:r>
-              <a:rPr lang="en-US" sz="2000" dirty="0">
-                <a:solidFill>
-                  <a:schemeClr val="bg1"/>
-                </a:solidFill>
-              </a:rPr>
-              <a:t> </a:t>
-            </a:r>
-            <a:r>
-              <a:rPr lang="en-US" sz="2000" dirty="0" err="1" smtClean="0">
-                <a:solidFill>
-                  <a:schemeClr val="bg1"/>
-                </a:solidFill>
-              </a:rPr>
-              <a:t>программы</a:t>
-            </a:r>
-            <a:r>
-              <a:rPr lang="en-US" sz="2000" dirty="0">
-                <a:solidFill>
-                  <a:schemeClr val="bg1"/>
-                </a:solidFill>
-              </a:rPr>
-              <a:t>;</a:t>
-            </a:r>
-            <a:endParaRPr lang="ru-RU" sz="2000" dirty="0">
-              <a:solidFill>
-                <a:schemeClr val="bg1"/>
-              </a:solidFill>
-            </a:endParaRPr>
+              <a:t>.</a:t>
+            </a:r>
           </a:p>
         </p:txBody>
       </p:sp>
@@ -6305,18 +6170,13 @@
           <a:lstStyle/>
           <a:p>
             <a:r>
-              <a:rPr lang="ru-RU" sz="5400" dirty="0" smtClean="0">
+              <a:rPr lang="ru-RU" sz="5400" dirty="0">
                 <a:solidFill>
                   <a:schemeClr val="bg1"/>
                 </a:solidFill>
               </a:rPr>
               <a:t>Нефункциональные требования</a:t>
             </a:r>
-            <a:endParaRPr lang="ru-RU" sz="5400" dirty="0">
-              <a:solidFill>
-                <a:schemeClr val="bg1"/>
-              </a:solidFill>
-            </a:endParaRPr>
           </a:p>
         </p:txBody>
       </p:sp>
@@ -6466,18 +6326,10 @@
                   <a:schemeClr val="bg1"/>
                 </a:solidFill>
               </a:rPr>
-              <a:t>удобство дальнейшего расширения </a:t>
-            </a:r>
-            <a:r>
-              <a:rPr lang="ru-RU" sz="2000" dirty="0" smtClean="0">
-                <a:solidFill>
-                  <a:schemeClr val="bg1"/>
-                </a:solidFill>
-              </a:rPr>
-              <a:t>проекта</a:t>
-            </a:r>
-            <a:r>
-              <a:rPr lang="en-US" sz="2000" dirty="0" smtClean="0">
+              <a:t>удобство дальнейшего расширения проекта</a:t>
+            </a:r>
+            <a:r>
+              <a:rPr lang="en-US" sz="2000" dirty="0">
                 <a:solidFill>
                   <a:schemeClr val="bg1"/>
                 </a:solidFill>
@@ -6975,18 +6827,13 @@
           <a:lstStyle/>
           <a:p>
             <a:r>
-              <a:rPr lang="ru-RU" dirty="0" smtClean="0">
+              <a:rPr lang="ru-RU" dirty="0">
                 <a:solidFill>
                   <a:schemeClr val="bg1"/>
                 </a:solidFill>
               </a:rPr>
               <a:t>Название игры</a:t>
             </a:r>
-            <a:endParaRPr lang="ru-RU" dirty="0">
-              <a:solidFill>
-                <a:schemeClr val="bg1"/>
-              </a:solidFill>
-            </a:endParaRPr>
           </a:p>
         </p:txBody>
       </p:sp>
@@ -7013,18 +6860,13 @@
           <a:lstStyle/>
           <a:p>
             <a:r>
-              <a:rPr lang="ru-RU" dirty="0" smtClean="0">
+              <a:rPr lang="ru-RU" dirty="0">
                 <a:solidFill>
                   <a:schemeClr val="bg1"/>
                 </a:solidFill>
               </a:rPr>
               <a:t>Кнопка для запуска игры</a:t>
             </a:r>
-            <a:endParaRPr lang="ru-RU" dirty="0">
-              <a:solidFill>
-                <a:schemeClr val="bg1"/>
-              </a:solidFill>
-            </a:endParaRPr>
           </a:p>
         </p:txBody>
       </p:sp>
@@ -7051,18 +6893,13 @@
           <a:lstStyle/>
           <a:p>
             <a:r>
-              <a:rPr lang="ru-RU" dirty="0" smtClean="0">
+              <a:rPr lang="ru-RU" dirty="0">
                 <a:solidFill>
                   <a:schemeClr val="bg1"/>
                 </a:solidFill>
               </a:rPr>
               <a:t>Кнопка для выхода из игры</a:t>
             </a:r>
-            <a:endParaRPr lang="ru-RU" dirty="0">
-              <a:solidFill>
-                <a:schemeClr val="bg1"/>
-              </a:solidFill>
-            </a:endParaRPr>
           </a:p>
         </p:txBody>
       </p:sp>
@@ -7166,15 +7003,7 @@
                   <a:schemeClr val="bg1"/>
                 </a:solidFill>
               </a:rPr>
-              <a:t>Функционал </a:t>
-            </a:r>
-            <a:r>
-              <a:rPr lang="ru-RU" sz="5400" b="1" dirty="0" smtClean="0">
-                <a:solidFill>
-                  <a:schemeClr val="bg1"/>
-                </a:solidFill>
-              </a:rPr>
-              <a:t>(Игровой процесс):</a:t>
+              <a:t>Функционал (Игровой процесс):</a:t>
             </a:r>
             <a:endParaRPr lang="ru-RU" sz="5400" dirty="0">
               <a:solidFill>
@@ -7375,18 +7204,13 @@
           <a:lstStyle/>
           <a:p>
             <a:r>
-              <a:rPr lang="ru-RU" dirty="0" smtClean="0">
+              <a:rPr lang="ru-RU" dirty="0">
                 <a:solidFill>
                   <a:schemeClr val="bg1"/>
                 </a:solidFill>
               </a:rPr>
               <a:t>Количество очков</a:t>
             </a:r>
-            <a:endParaRPr lang="ru-RU" dirty="0">
-              <a:solidFill>
-                <a:schemeClr val="bg1"/>
-              </a:solidFill>
-            </a:endParaRPr>
           </a:p>
         </p:txBody>
       </p:sp>
@@ -7413,7 +7237,7 @@
           <a:lstStyle/>
           <a:p>
             <a:r>
-              <a:rPr lang="ru-RU" dirty="0" smtClean="0">
+              <a:rPr lang="ru-RU" dirty="0">
                 <a:solidFill>
                   <a:schemeClr val="bg1"/>
                 </a:solidFill>
@@ -7421,22 +7245,17 @@
               <a:t>Текущий</a:t>
             </a:r>
             <a:r>
-              <a:rPr lang="ru-RU" dirty="0" smtClean="0"/>
+              <a:rPr lang="ru-RU" dirty="0"/>
               <a:t> </a:t>
             </a:r>
             <a:r>
-              <a:rPr lang="ru-RU" dirty="0" smtClean="0">
+              <a:rPr lang="ru-RU" dirty="0">
                 <a:solidFill>
                   <a:schemeClr val="bg1"/>
                 </a:solidFill>
               </a:rPr>
               <a:t>уровень</a:t>
             </a:r>
-            <a:endParaRPr lang="ru-RU" dirty="0">
-              <a:solidFill>
-                <a:schemeClr val="bg1"/>
-              </a:solidFill>
-            </a:endParaRPr>
           </a:p>
         </p:txBody>
       </p:sp>
@@ -7463,18 +7282,13 @@
           <a:lstStyle/>
           <a:p>
             <a:r>
-              <a:rPr lang="ru-RU" dirty="0" smtClean="0">
+              <a:rPr lang="ru-RU" dirty="0">
                 <a:solidFill>
                   <a:schemeClr val="bg1"/>
                 </a:solidFill>
               </a:rPr>
               <a:t>Кнопка для перезапуска игры</a:t>
             </a:r>
-            <a:endParaRPr lang="ru-RU" dirty="0">
-              <a:solidFill>
-                <a:schemeClr val="bg1"/>
-              </a:solidFill>
-            </a:endParaRPr>
           </a:p>
         </p:txBody>
       </p:sp>
@@ -7501,34 +7315,13 @@
           <a:lstStyle/>
           <a:p>
             <a:r>
-              <a:rPr lang="ru-RU" dirty="0" smtClean="0">
-                <a:solidFill>
-                  <a:schemeClr val="bg1"/>
-                </a:solidFill>
-              </a:rPr>
-              <a:t>Кнопка для </a:t>
-            </a:r>
-            <a:r>
               <a:rPr lang="ru-RU" dirty="0">
                 <a:solidFill>
                   <a:schemeClr val="bg1"/>
                 </a:solidFill>
               </a:rPr>
-              <a:t>з</a:t>
-            </a:r>
-            <a:r>
-              <a:rPr lang="ru-RU" dirty="0" smtClean="0">
-                <a:solidFill>
-                  <a:schemeClr val="bg1"/>
-                </a:solidFill>
-              </a:rPr>
-              <a:t>авершения игры и закрытия программы</a:t>
-            </a:r>
-            <a:endParaRPr lang="ru-RU" dirty="0">
-              <a:solidFill>
-                <a:schemeClr val="bg1"/>
-              </a:solidFill>
-            </a:endParaRPr>
+              <a:t>Кнопка для завершения игры и закрытия программы</a:t>
+            </a:r>
           </a:p>
         </p:txBody>
       </p:sp>
@@ -7665,7 +7458,7 @@
           </a:lstStyle>
           <a:p>
             <a:r>
-              <a:rPr lang="ru-RU" sz="5400" b="1" dirty="0" smtClean="0">
+              <a:rPr lang="ru-RU" sz="5400" b="1" dirty="0">
                 <a:solidFill>
                   <a:schemeClr val="bg1"/>
                 </a:solidFill>
